--- a/docs/crew_ops_advisor_project_deck.pptx
+++ b/docs/crew_ops_advisor_project_deck.pptx
@@ -7433,7 +7433,7 @@
                   <a:srgbClr val="F3F7FB"/>
                 </a:solidFill>
               </a:rPr>
-              <a:t>24/24</a:t>
+              <a:t>30/30</a:t>
             </a:r>
             <a:endParaRPr lang="en-US" sz="1900" dirty="0"/>
           </a:p>
@@ -7809,7 +7809,7 @@
         <p:spPr>
           <a:xfrm>
             <a:off x="6565392" y="3621024"/>
-            <a:ext cx="4407408" cy="914400"/>
+            <a:ext cx="4407408" cy="1097280"/>
           </a:xfrm>
           <a:prstGeom prst="rect">
             <a:avLst/>
@@ -7869,7 +7869,7 @@
                 <a:ea typeface="Aptos" pitchFamily="34" charset="-122"/>
                 <a:cs typeface="Aptos" pitchFamily="34" charset="-120"/>
               </a:rPr>
-              <a:t>• Cloudflare Workers cannot reach a private Tailscale model endpoint — deploy engine/workspace separately or expose a public model endpoint</a:t>
+              <a:t>• The deployed chat holds no key of its own — the controller’s key stays in the browser and rides with each question, because a Worker isolate does not outlive a request</a:t>
             </a:r>
             <a:endParaRPr lang="en-US" sz="1220" dirty="0"/>
           </a:p>
